--- a/study_logs/QVF_report_20260820.pptx
+++ b/study_logs/QVF_report_20260820.pptx
@@ -3618,7 +3618,7 @@
                 <a:ea typeface="Microsoft YaHei" pitchFamily="34" charset="-122"/>
                 <a:cs typeface="Microsoft YaHei" pitchFamily="34" charset="-120"/>
               </a:rPr>
-              <a:t>48.3%</a:t>
+              <a:t>47.6%</a:t>
             </a:r>
             <a:endParaRPr lang="en-US" sz="3200" dirty="0"/>
           </a:p>
@@ -3657,7 +3657,7 @@
                 <a:ea typeface="Microsoft YaHei" pitchFamily="34" charset="-122"/>
                 <a:cs typeface="Microsoft YaHei" pitchFamily="34" charset="-120"/>
               </a:rPr>
-              <a:t>检索原文</a:t>
+              <a:t>提示词基线</a:t>
             </a:r>
             <a:endParaRPr lang="en-US" sz="1300" dirty="0"/>
           </a:p>
@@ -4291,7 +4291,7 @@
                 <a:ea typeface="Microsoft YaHei" pitchFamily="34" charset="-122"/>
                 <a:cs typeface="Microsoft YaHei" pitchFamily="34" charset="-120"/>
               </a:rPr>
-              <a:t>提示词基线 47.6%:一条指令在聚合类问题上买不到东西</a:t>
+              <a:t>定价锚 = 提示词臂 47.6%(三段配对检验均预注册在此臂);直读 48.3% 与之统计不可区分(−0.7pp,χ²=0.052)</a:t>
             </a:r>
             <a:endParaRPr lang="en-US" sz="1350" dirty="0"/>
           </a:p>
@@ -8980,7 +8980,7 @@
                           <a:ea typeface="Microsoft YaHei" pitchFamily="34" charset="-122"/>
                           <a:cs typeface="Microsoft YaHei" pitchFamily="34" charset="-120"/>
                         </a:rPr>
-                        <a:t>47.6%,只买 +1.0pp</a:t>
+                        <a:t>47.6%,−0.7pp(χ²=0.052,统计上为零)</a:t>
                       </a:r>
                       <a:endParaRPr lang="en-US" sz="1150" dirty="0">
                         <a:latin typeface="Microsoft YaHei" charset="0"/>
@@ -13556,7 +13556,7 @@
                           <a:ea typeface="Microsoft YaHei" pitchFamily="34" charset="-122"/>
                           <a:cs typeface="Microsoft YaHei" pitchFamily="34" charset="-120"/>
                         </a:rPr>
-                        <a:t>选择再 +7;认证+计算再 +20</a:t>
+                        <a:t>选择 +6.7;认证+计算再 +13.3</a:t>
                       </a:r>
                       <a:endParaRPr lang="en-US" sz="1200" dirty="0">
                         <a:latin typeface="Microsoft YaHei" charset="0"/>
@@ -14167,7 +14167,7 @@
                 <a:ea typeface="Microsoft YaHei" pitchFamily="34" charset="-122"/>
                 <a:cs typeface="Microsoft YaHei" pitchFamily="34" charset="-120"/>
               </a:rPr>
-              <a:t>补充:换更强模型,「变化历程」类问题四档模型全零;加一条提示词只买到 +1.0pp。</a:t>
+              <a:t>补充:换更强模型,「变化历程」类问题四档模型全零;加一条提示词只买到 +1.0pp(变化历程类三臂:直读 26.4% → 提示词 27.4%)。</a:t>
             </a:r>
             <a:endParaRPr lang="en-US" sz="1300" dirty="0"/>
           </a:p>
@@ -19595,7 +19595,7 @@
                           <a:ea typeface="Microsoft YaHei" pitchFamily="34" charset="-122"/>
                           <a:cs typeface="Microsoft YaHei" pitchFamily="34" charset="-120"/>
                         </a:rPr>
-                        <a:t>314(79)</a:t>
+                        <a:t>418(105)</a:t>
                       </a:r>
                       <a:endParaRPr lang="en-US" sz="1250" dirty="0">
                         <a:latin typeface="Microsoft YaHei" charset="0"/>
@@ -19660,7 +19660,7 @@
                           <a:ea typeface="Microsoft YaHei" pitchFamily="34" charset="-122"/>
                           <a:cs typeface="Microsoft YaHei" pitchFamily="34" charset="-120"/>
                         </a:rPr>
-                        <a:t>+33.8pp</a:t>
+                        <a:t>+35.4pp</a:t>
                       </a:r>
                       <a:endParaRPr lang="en-US" sz="1250" dirty="0">
                         <a:latin typeface="Microsoft YaHei" charset="0"/>
@@ -19725,7 +19725,7 @@
                           <a:ea typeface="Microsoft YaHei" pitchFamily="34" charset="-122"/>
                           <a:cs typeface="Microsoft YaHei" pitchFamily="34" charset="-120"/>
                         </a:rPr>
-                        <a:t>[+27.0, +40.2]</a:t>
+                        <a:t>[+28.5, +42.1]</a:t>
                       </a:r>
                       <a:endParaRPr lang="en-US" sz="1250" dirty="0">
                         <a:latin typeface="Microsoft YaHei" charset="0"/>
@@ -19790,7 +19790,7 @@
                           <a:ea typeface="Microsoft YaHei" pitchFamily="34" charset="-122"/>
                           <a:cs typeface="Microsoft YaHei" pitchFamily="34" charset="-120"/>
                         </a:rPr>
-                        <a:t>1.2e-14</a:t>
+                        <a:t>4.1e-17</a:t>
                       </a:r>
                       <a:endParaRPr lang="en-US" sz="1250" dirty="0">
                         <a:latin typeface="Microsoft YaHei" charset="0"/>
@@ -22409,7 +22409,7 @@
                           <a:ea typeface="Microsoft YaHei" pitchFamily="34" charset="-122"/>
                           <a:cs typeface="Microsoft YaHei" pitchFamily="34" charset="-120"/>
                         </a:rPr>
-                        <a:t>+29 ~ +38pp,簇校正显著</a:t>
+                        <a:t>+6.8 ~ +38.4pp,5/7 卷簇校正显著(1 卷边际、1 卷 n.s.)</a:t>
                       </a:r>
                       <a:endParaRPr lang="en-US" sz="1200" dirty="0">
                         <a:latin typeface="Microsoft YaHei" charset="0"/>
